--- a/res/귀찮다.pptx
+++ b/res/귀찮다.pptx
@@ -6,6 +6,7 @@
   </p:sldMasterIdLst>
   <p:sldIdLst>
     <p:sldId id="256" r:id="rId2"/>
+    <p:sldId id="257" r:id="rId3"/>
   </p:sldIdLst>
   <p:sldSz cx="12192000" cy="6858000"/>
   <p:notesSz cx="6858000" cy="9144000"/>
@@ -243,7 +244,7 @@
           <a:p>
             <a:fld id="{878C8DE8-A378-4703-BE74-2F8D1E7F740E}" type="datetimeFigureOut">
               <a:rPr lang="ko-KR" altLang="en-US" smtClean="0"/>
-              <a:t>2022-03-03(Thu)</a:t>
+              <a:t>2022-03-13(Sun)</a:t>
             </a:fld>
             <a:endParaRPr lang="ko-KR" altLang="en-US"/>
           </a:p>
@@ -413,7 +414,7 @@
           <a:p>
             <a:fld id="{878C8DE8-A378-4703-BE74-2F8D1E7F740E}" type="datetimeFigureOut">
               <a:rPr lang="ko-KR" altLang="en-US" smtClean="0"/>
-              <a:t>2022-03-03(Thu)</a:t>
+              <a:t>2022-03-13(Sun)</a:t>
             </a:fld>
             <a:endParaRPr lang="ko-KR" altLang="en-US"/>
           </a:p>
@@ -593,7 +594,7 @@
           <a:p>
             <a:fld id="{878C8DE8-A378-4703-BE74-2F8D1E7F740E}" type="datetimeFigureOut">
               <a:rPr lang="ko-KR" altLang="en-US" smtClean="0"/>
-              <a:t>2022-03-03(Thu)</a:t>
+              <a:t>2022-03-13(Sun)</a:t>
             </a:fld>
             <a:endParaRPr lang="ko-KR" altLang="en-US"/>
           </a:p>
@@ -763,7 +764,7 @@
           <a:p>
             <a:fld id="{878C8DE8-A378-4703-BE74-2F8D1E7F740E}" type="datetimeFigureOut">
               <a:rPr lang="ko-KR" altLang="en-US" smtClean="0"/>
-              <a:t>2022-03-03(Thu)</a:t>
+              <a:t>2022-03-13(Sun)</a:t>
             </a:fld>
             <a:endParaRPr lang="ko-KR" altLang="en-US"/>
           </a:p>
@@ -1009,7 +1010,7 @@
           <a:p>
             <a:fld id="{878C8DE8-A378-4703-BE74-2F8D1E7F740E}" type="datetimeFigureOut">
               <a:rPr lang="ko-KR" altLang="en-US" smtClean="0"/>
-              <a:t>2022-03-03(Thu)</a:t>
+              <a:t>2022-03-13(Sun)</a:t>
             </a:fld>
             <a:endParaRPr lang="ko-KR" altLang="en-US"/>
           </a:p>
@@ -1241,7 +1242,7 @@
           <a:p>
             <a:fld id="{878C8DE8-A378-4703-BE74-2F8D1E7F740E}" type="datetimeFigureOut">
               <a:rPr lang="ko-KR" altLang="en-US" smtClean="0"/>
-              <a:t>2022-03-03(Thu)</a:t>
+              <a:t>2022-03-13(Sun)</a:t>
             </a:fld>
             <a:endParaRPr lang="ko-KR" altLang="en-US"/>
           </a:p>
@@ -1608,7 +1609,7 @@
           <a:p>
             <a:fld id="{878C8DE8-A378-4703-BE74-2F8D1E7F740E}" type="datetimeFigureOut">
               <a:rPr lang="ko-KR" altLang="en-US" smtClean="0"/>
-              <a:t>2022-03-03(Thu)</a:t>
+              <a:t>2022-03-13(Sun)</a:t>
             </a:fld>
             <a:endParaRPr lang="ko-KR" altLang="en-US"/>
           </a:p>
@@ -1726,7 +1727,7 @@
           <a:p>
             <a:fld id="{878C8DE8-A378-4703-BE74-2F8D1E7F740E}" type="datetimeFigureOut">
               <a:rPr lang="ko-KR" altLang="en-US" smtClean="0"/>
-              <a:t>2022-03-03(Thu)</a:t>
+              <a:t>2022-03-13(Sun)</a:t>
             </a:fld>
             <a:endParaRPr lang="ko-KR" altLang="en-US"/>
           </a:p>
@@ -1821,7 +1822,7 @@
           <a:p>
             <a:fld id="{878C8DE8-A378-4703-BE74-2F8D1E7F740E}" type="datetimeFigureOut">
               <a:rPr lang="ko-KR" altLang="en-US" smtClean="0"/>
-              <a:t>2022-03-03(Thu)</a:t>
+              <a:t>2022-03-13(Sun)</a:t>
             </a:fld>
             <a:endParaRPr lang="ko-KR" altLang="en-US"/>
           </a:p>
@@ -2098,7 +2099,7 @@
           <a:p>
             <a:fld id="{878C8DE8-A378-4703-BE74-2F8D1E7F740E}" type="datetimeFigureOut">
               <a:rPr lang="ko-KR" altLang="en-US" smtClean="0"/>
-              <a:t>2022-03-03(Thu)</a:t>
+              <a:t>2022-03-13(Sun)</a:t>
             </a:fld>
             <a:endParaRPr lang="ko-KR" altLang="en-US"/>
           </a:p>
@@ -2351,7 +2352,7 @@
           <a:p>
             <a:fld id="{878C8DE8-A378-4703-BE74-2F8D1E7F740E}" type="datetimeFigureOut">
               <a:rPr lang="ko-KR" altLang="en-US" smtClean="0"/>
-              <a:t>2022-03-03(Thu)</a:t>
+              <a:t>2022-03-13(Sun)</a:t>
             </a:fld>
             <a:endParaRPr lang="ko-KR" altLang="en-US"/>
           </a:p>
@@ -2564,7 +2565,7 @@
           <a:p>
             <a:fld id="{878C8DE8-A378-4703-BE74-2F8D1E7F740E}" type="datetimeFigureOut">
               <a:rPr lang="ko-KR" altLang="en-US" smtClean="0"/>
-              <a:t>2022-03-03(Thu)</a:t>
+              <a:t>2022-03-13(Sun)</a:t>
             </a:fld>
             <a:endParaRPr lang="ko-KR" altLang="en-US"/>
           </a:p>
@@ -3121,18 +3122,54 @@
           <a:p>
             <a:pPr algn="ctr"/>
             <a:r>
-              <a:rPr lang="ko-KR" altLang="en-US" sz="3200" b="1" dirty="0" err="1" smtClean="0"/>
+              <a:rPr lang="ko-KR" altLang="en-US" sz="3200" b="1" dirty="0" err="1" smtClean="0">
+                <a:effectLst>
+                  <a:glow rad="101600">
+                    <a:schemeClr val="accent1">
+                      <a:satMod val="175000"/>
+                      <a:alpha val="40000"/>
+                    </a:schemeClr>
+                  </a:glow>
+                </a:effectLst>
+              </a:rPr>
               <a:t>고고씽</a:t>
             </a:r>
             <a:r>
-              <a:rPr lang="en-US" altLang="ko-KR" sz="3200" b="1" dirty="0" smtClean="0"/>
+              <a:rPr lang="en-US" altLang="ko-KR" sz="3200" b="1" dirty="0" smtClean="0">
+                <a:effectLst>
+                  <a:glow rad="101600">
+                    <a:schemeClr val="accent1">
+                      <a:satMod val="175000"/>
+                      <a:alpha val="40000"/>
+                    </a:schemeClr>
+                  </a:glow>
+                </a:effectLst>
+              </a:rPr>
               <a:t>~</a:t>
             </a:r>
             <a:r>
-              <a:rPr lang="ko-KR" altLang="en-US" sz="3200" b="1" dirty="0" err="1" smtClean="0"/>
+              <a:rPr lang="ko-KR" altLang="en-US" sz="3200" b="1" dirty="0" err="1" smtClean="0">
+                <a:effectLst>
+                  <a:glow rad="101600">
+                    <a:schemeClr val="accent1">
+                      <a:satMod val="175000"/>
+                      <a:alpha val="40000"/>
+                    </a:schemeClr>
+                  </a:glow>
+                </a:effectLst>
+              </a:rPr>
               <a:t>ㅋ</a:t>
             </a:r>
-            <a:endParaRPr lang="ko-KR" altLang="en-US" sz="3200" b="1" dirty="0"/>
+            <a:endParaRPr lang="ko-KR" altLang="en-US" sz="3200" b="1" dirty="0">
+              <a:effectLst>
+                <a:glow rad="101600">
+                  <a:schemeClr val="accent1">
+                    <a:satMod val="175000"/>
+                    <a:alpha val="40000"/>
+                  </a:schemeClr>
+                </a:glow>
+              </a:effectLst>
+            </a:endParaRPr>
           </a:p>
         </p:txBody>
       </p:sp>
@@ -3188,6 +3225,386 @@
     <p:extLst>
       <p:ext uri="{BB962C8B-B14F-4D97-AF65-F5344CB8AC3E}">
         <p14:creationId xmlns:p14="http://schemas.microsoft.com/office/powerpoint/2010/main" val="3178254515"/>
+      </p:ext>
+    </p:extLst>
+  </p:cSld>
+  <p:clrMapOvr>
+    <a:masterClrMapping/>
+  </p:clrMapOvr>
+</p:sld>
+</file>
+
+<file path=ppt/slides/slide2.xml><?xml version="1.0" encoding="utf-8"?>
+<p:sld xmlns:a="http://schemas.openxmlformats.org/drawingml/2006/main" xmlns:r="http://schemas.openxmlformats.org/officeDocument/2006/relationships" xmlns:p="http://schemas.openxmlformats.org/presentationml/2006/main">
+  <p:cSld>
+    <p:spTree>
+      <p:nvGrpSpPr>
+        <p:cNvPr id="1" name=""/>
+        <p:cNvGrpSpPr/>
+        <p:nvPr/>
+      </p:nvGrpSpPr>
+      <p:grpSpPr>
+        <a:xfrm>
+          <a:off x="0" y="0"/>
+          <a:ext cx="0" cy="0"/>
+          <a:chOff x="0" y="0"/>
+          <a:chExt cx="0" cy="0"/>
+        </a:xfrm>
+      </p:grpSpPr>
+      <p:pic>
+        <p:nvPicPr>
+          <p:cNvPr id="4" name="그림 3"/>
+          <p:cNvPicPr>
+            <a:picLocks noChangeAspect="1"/>
+          </p:cNvPicPr>
+          <p:nvPr/>
+        </p:nvPicPr>
+        <p:blipFill>
+          <a:blip r:embed="rId2">
+            <a:extLst>
+              <a:ext uri="{28A0092B-C50C-407E-A947-70E740481C1C}">
+                <a14:useLocalDpi xmlns:a14="http://schemas.microsoft.com/office/drawing/2010/main" val="0"/>
+              </a:ext>
+            </a:extLst>
+          </a:blip>
+          <a:stretch>
+            <a:fillRect/>
+          </a:stretch>
+        </p:blipFill>
+        <p:spPr>
+          <a:xfrm>
+            <a:off x="7360480" y="1149525"/>
+            <a:ext cx="4038095" cy="3758730"/>
+          </a:xfrm>
+          <a:prstGeom prst="rect">
+            <a:avLst/>
+          </a:prstGeom>
+          <a:solidFill>
+            <a:srgbClr val="FFFFFF">
+              <a:shade val="85000"/>
+            </a:srgbClr>
+          </a:solidFill>
+          <a:ln w="190500" cap="sq">
+            <a:solidFill>
+              <a:srgbClr val="FFFFFF"/>
+            </a:solidFill>
+            <a:miter lim="800000"/>
+          </a:ln>
+          <a:effectLst>
+            <a:outerShdw blurRad="55000" dist="18000" dir="5400000" algn="tl" rotWithShape="0">
+              <a:srgbClr val="000000">
+                <a:alpha val="40000"/>
+              </a:srgbClr>
+            </a:outerShdw>
+          </a:effectLst>
+          <a:scene3d>
+            <a:camera prst="orthographicFront"/>
+            <a:lightRig rig="twoPt" dir="t">
+              <a:rot lat="0" lon="0" rev="7200000"/>
+            </a:lightRig>
+          </a:scene3d>
+          <a:sp3d>
+            <a:bevelT w="25400" h="19050"/>
+            <a:contourClr>
+              <a:srgbClr val="FFFFFF"/>
+            </a:contourClr>
+          </a:sp3d>
+        </p:spPr>
+      </p:pic>
+      <p:sp>
+        <p:nvSpPr>
+          <p:cNvPr id="6" name="TextBox 5"/>
+          <p:cNvSpPr txBox="1"/>
+          <p:nvPr/>
+        </p:nvSpPr>
+        <p:spPr>
+          <a:xfrm>
+            <a:off x="7595062" y="4508145"/>
+            <a:ext cx="3469178" cy="400110"/>
+          </a:xfrm>
+          <a:prstGeom prst="rect">
+            <a:avLst/>
+          </a:prstGeom>
+          <a:noFill/>
+        </p:spPr>
+        <p:txBody>
+          <a:bodyPr wrap="square" rtlCol="0">
+            <a:spAutoFit/>
+          </a:bodyPr>
+          <a:lstStyle/>
+          <a:p>
+            <a:pPr algn="ctr"/>
+            <a:r>
+              <a:rPr lang="ko-KR" altLang="en-US" sz="2000" dirty="0" smtClean="0">
+                <a:latin typeface="HY울릉도M" panose="02030600000101010101" pitchFamily="18" charset="-127"/>
+                <a:ea typeface="HY울릉도M" panose="02030600000101010101" pitchFamily="18" charset="-127"/>
+              </a:rPr>
+              <a:t>귀찮다 </a:t>
+            </a:r>
+            <a:r>
+              <a:rPr lang="en-US" altLang="ko-KR" sz="2000" dirty="0" smtClean="0">
+                <a:latin typeface="HY울릉도M" panose="02030600000101010101" pitchFamily="18" charset="-127"/>
+                <a:ea typeface="HY울릉도M" panose="02030600000101010101" pitchFamily="18" charset="-127"/>
+              </a:rPr>
+              <a:t>v2.5</a:t>
+            </a:r>
+            <a:r>
+              <a:rPr lang="ko-KR" altLang="en-US" sz="2000" dirty="0" smtClean="0">
+                <a:latin typeface="HY울릉도M" panose="02030600000101010101" pitchFamily="18" charset="-127"/>
+                <a:ea typeface="HY울릉도M" panose="02030600000101010101" pitchFamily="18" charset="-127"/>
+              </a:rPr>
+              <a:t>를</a:t>
+            </a:r>
+            <a:r>
+              <a:rPr lang="en-US" altLang="ko-KR" sz="2000" dirty="0">
+                <a:latin typeface="HY울릉도M" panose="02030600000101010101" pitchFamily="18" charset="-127"/>
+                <a:ea typeface="HY울릉도M" panose="02030600000101010101" pitchFamily="18" charset="-127"/>
+              </a:rPr>
+              <a:t> </a:t>
+            </a:r>
+            <a:r>
+              <a:rPr lang="ko-KR" altLang="en-US" sz="2000" dirty="0" smtClean="0">
+                <a:latin typeface="HY울릉도M" panose="02030600000101010101" pitchFamily="18" charset="-127"/>
+                <a:ea typeface="HY울릉도M" panose="02030600000101010101" pitchFamily="18" charset="-127"/>
+              </a:rPr>
+              <a:t>시작합니다</a:t>
+            </a:r>
+            <a:r>
+              <a:rPr lang="en-US" altLang="ko-KR" sz="2000" dirty="0" smtClean="0">
+                <a:latin typeface="HY울릉도M" panose="02030600000101010101" pitchFamily="18" charset="-127"/>
+                <a:ea typeface="HY울릉도M" panose="02030600000101010101" pitchFamily="18" charset="-127"/>
+              </a:rPr>
+              <a:t>…</a:t>
+            </a:r>
+            <a:endParaRPr lang="ko-KR" altLang="en-US" sz="2000" dirty="0">
+              <a:latin typeface="HY울릉도M" panose="02030600000101010101" pitchFamily="18" charset="-127"/>
+              <a:ea typeface="HY울릉도M" panose="02030600000101010101" pitchFamily="18" charset="-127"/>
+            </a:endParaRPr>
+          </a:p>
+        </p:txBody>
+      </p:sp>
+      <p:pic>
+        <p:nvPicPr>
+          <p:cNvPr id="7" name="그림 6"/>
+          <p:cNvPicPr>
+            <a:picLocks noChangeAspect="1"/>
+          </p:cNvPicPr>
+          <p:nvPr/>
+        </p:nvPicPr>
+        <p:blipFill>
+          <a:blip r:embed="rId3">
+            <a:extLst>
+              <a:ext uri="{28A0092B-C50C-407E-A947-70E740481C1C}">
+                <a14:useLocalDpi xmlns:a14="http://schemas.microsoft.com/office/drawing/2010/main" val="0"/>
+              </a:ext>
+            </a:extLst>
+          </a:blip>
+          <a:stretch>
+            <a:fillRect/>
+          </a:stretch>
+        </p:blipFill>
+        <p:spPr>
+          <a:xfrm>
+            <a:off x="1713823" y="1460526"/>
+            <a:ext cx="3028571" cy="3047619"/>
+          </a:xfrm>
+          <a:prstGeom prst="rect">
+            <a:avLst/>
+          </a:prstGeom>
+          <a:ln>
+            <a:solidFill>
+              <a:srgbClr val="92D050"/>
+            </a:solidFill>
+          </a:ln>
+        </p:spPr>
+      </p:pic>
+      <p:sp>
+        <p:nvSpPr>
+          <p:cNvPr id="2" name="직사각형 1"/>
+          <p:cNvSpPr/>
+          <p:nvPr/>
+        </p:nvSpPr>
+        <p:spPr>
+          <a:xfrm>
+            <a:off x="1713823" y="3965171"/>
+            <a:ext cx="3028571" cy="542974"/>
+          </a:xfrm>
+          <a:prstGeom prst="rect">
+            <a:avLst/>
+          </a:prstGeom>
+          <a:solidFill>
+            <a:schemeClr val="accent6">
+              <a:alpha val="50000"/>
+            </a:schemeClr>
+          </a:solidFill>
+          <a:ln>
+            <a:noFill/>
+          </a:ln>
+        </p:spPr>
+        <p:style>
+          <a:lnRef idx="0">
+            <a:scrgbClr r="0" g="0" b="0"/>
+          </a:lnRef>
+          <a:fillRef idx="0">
+            <a:scrgbClr r="0" g="0" b="0"/>
+          </a:fillRef>
+          <a:effectRef idx="0">
+            <a:scrgbClr r="0" g="0" b="0"/>
+          </a:effectRef>
+          <a:fontRef idx="minor">
+            <a:schemeClr val="lt1"/>
+          </a:fontRef>
+        </p:style>
+        <p:txBody>
+          <a:bodyPr rtlCol="0" anchor="ctr"/>
+          <a:lstStyle/>
+          <a:p>
+            <a:pPr algn="ctr"/>
+            <a:endParaRPr lang="ko-KR" altLang="en-US"/>
+          </a:p>
+        </p:txBody>
+      </p:sp>
+      <p:sp>
+        <p:nvSpPr>
+          <p:cNvPr id="8" name="TextBox 7"/>
+          <p:cNvSpPr txBox="1"/>
+          <p:nvPr/>
+        </p:nvSpPr>
+        <p:spPr>
+          <a:xfrm>
+            <a:off x="1746373" y="4045407"/>
+            <a:ext cx="2963470" cy="369332"/>
+          </a:xfrm>
+          <a:prstGeom prst="rect">
+            <a:avLst/>
+          </a:prstGeom>
+          <a:noFill/>
+        </p:spPr>
+        <p:txBody>
+          <a:bodyPr wrap="square" rtlCol="0">
+            <a:spAutoFit/>
+          </a:bodyPr>
+          <a:lstStyle/>
+          <a:p>
+            <a:pPr algn="ctr"/>
+            <a:r>
+              <a:rPr lang="ko-KR" altLang="en-US" dirty="0" smtClean="0">
+                <a:ln w="3175">
+                  <a:solidFill>
+                    <a:schemeClr val="tx1">
+                      <a:lumMod val="65000"/>
+                      <a:lumOff val="35000"/>
+                      <a:alpha val="70000"/>
+                    </a:schemeClr>
+                  </a:solidFill>
+                </a:ln>
+                <a:solidFill>
+                  <a:srgbClr val="0070C0"/>
+                </a:solidFill>
+                <a:latin typeface="KBIZ한마음고딕 H" panose="02020503020101020101" pitchFamily="18" charset="-127"/>
+                <a:ea typeface="KBIZ한마음고딕 H" panose="02020503020101020101" pitchFamily="18" charset="-127"/>
+              </a:rPr>
+              <a:t>오리 </a:t>
+            </a:r>
+            <a:r>
+              <a:rPr lang="ko-KR" altLang="en-US" dirty="0" smtClean="0">
+                <a:ln w="3175">
+                  <a:solidFill>
+                    <a:schemeClr val="tx1">
+                      <a:lumMod val="65000"/>
+                      <a:lumOff val="35000"/>
+                      <a:alpha val="70000"/>
+                    </a:schemeClr>
+                  </a:solidFill>
+                </a:ln>
+                <a:solidFill>
+                  <a:srgbClr val="FF3B3B"/>
+                </a:solidFill>
+                <a:latin typeface="KBIZ한마음고딕 H" panose="02020503020101020101" pitchFamily="18" charset="-127"/>
+                <a:ea typeface="KBIZ한마음고딕 H" panose="02020503020101020101" pitchFamily="18" charset="-127"/>
+              </a:rPr>
+              <a:t>만수무강</a:t>
+            </a:r>
+            <a:r>
+              <a:rPr lang="ko-KR" altLang="en-US" dirty="0" smtClean="0">
+                <a:ln w="3175">
+                  <a:solidFill>
+                    <a:schemeClr val="tx1">
+                      <a:lumMod val="65000"/>
+                      <a:lumOff val="35000"/>
+                      <a:alpha val="70000"/>
+                    </a:schemeClr>
+                  </a:solidFill>
+                </a:ln>
+                <a:solidFill>
+                  <a:srgbClr val="FFC000"/>
+                </a:solidFill>
+                <a:latin typeface="KBIZ한마음고딕 H" panose="02020503020101020101" pitchFamily="18" charset="-127"/>
+                <a:ea typeface="KBIZ한마음고딕 H" panose="02020503020101020101" pitchFamily="18" charset="-127"/>
+              </a:rPr>
+              <a:t>하소서</a:t>
+            </a:r>
+            <a:r>
+              <a:rPr lang="ko-KR" altLang="en-US" dirty="0" smtClean="0">
+                <a:ln w="3175">
+                  <a:solidFill>
+                    <a:schemeClr val="tx1">
+                      <a:lumMod val="65000"/>
+                      <a:lumOff val="35000"/>
+                      <a:alpha val="70000"/>
+                    </a:schemeClr>
+                  </a:solidFill>
+                </a:ln>
+                <a:solidFill>
+                  <a:srgbClr val="0070C0"/>
+                </a:solidFill>
+                <a:latin typeface="KBIZ한마음고딕 H" panose="02020503020101020101" pitchFamily="18" charset="-127"/>
+                <a:ea typeface="KBIZ한마음고딕 H" panose="02020503020101020101" pitchFamily="18" charset="-127"/>
+              </a:rPr>
+              <a:t> </a:t>
+            </a:r>
+            <a:r>
+              <a:rPr lang="en-US" altLang="ko-KR" dirty="0" smtClean="0">
+                <a:ln w="3175">
+                  <a:solidFill>
+                    <a:schemeClr val="tx1">
+                      <a:lumMod val="65000"/>
+                      <a:lumOff val="35000"/>
+                      <a:alpha val="70000"/>
+                    </a:schemeClr>
+                  </a:solidFill>
+                </a:ln>
+                <a:solidFill>
+                  <a:srgbClr val="7030A0"/>
+                </a:solidFill>
+                <a:latin typeface="KBIZ한마음고딕 H" panose="02020503020101020101" pitchFamily="18" charset="-127"/>
+                <a:ea typeface="KBIZ한마음고딕 H" panose="02020503020101020101" pitchFamily="18" charset="-127"/>
+              </a:rPr>
+              <a:t>Edition</a:t>
+            </a:r>
+            <a:endParaRPr lang="ko-KR" altLang="en-US" dirty="0">
+              <a:ln w="3175">
+                <a:solidFill>
+                  <a:schemeClr val="tx1">
+                    <a:lumMod val="65000"/>
+                    <a:lumOff val="35000"/>
+                    <a:alpha val="70000"/>
+                  </a:schemeClr>
+                </a:solidFill>
+              </a:ln>
+              <a:solidFill>
+                <a:srgbClr val="7030A0"/>
+              </a:solidFill>
+              <a:latin typeface="KBIZ한마음고딕 H" panose="02020503020101020101" pitchFamily="18" charset="-127"/>
+              <a:ea typeface="KBIZ한마음고딕 H" panose="02020503020101020101" pitchFamily="18" charset="-127"/>
+            </a:endParaRPr>
+          </a:p>
+        </p:txBody>
+      </p:sp>
+    </p:spTree>
+    <p:extLst>
+      <p:ext uri="{BB962C8B-B14F-4D97-AF65-F5344CB8AC3E}">
+        <p14:creationId xmlns:p14="http://schemas.microsoft.com/office/powerpoint/2010/main" val="743063627"/>
       </p:ext>
     </p:extLst>
   </p:cSld>
